--- a/skill-forks/thesis-defense-ja/example/deck.pptx
+++ b/skill-forks/thesis-defense-ja/example/deck.pptx
@@ -1077,7 +1077,7 @@
           <a:p>
             <a:fld id="{5BCAD085-E8A6-8845-BD4E-CB4CCA059FC4}" type="datetimeFigureOut">
               <a:rPr lang="en-US" smtClean="0"/>
-              <a:t>10/14/2026</a:t>
+              <a:t>10/16/2026</a:t>
             </a:fld>
             <a:endParaRPr lang="en-US"/>
           </a:p>
@@ -1245,7 +1245,7 @@
           <a:p>
             <a:fld id="{5BCAD085-E8A6-8845-BD4E-CB4CCA059FC4}" type="datetimeFigureOut">
               <a:rPr lang="en-US" smtClean="0"/>
-              <a:t>10/14/2026</a:t>
+              <a:t>10/16/2026</a:t>
             </a:fld>
             <a:endParaRPr lang="en-US"/>
           </a:p>
@@ -1423,7 +1423,7 @@
           <a:p>
             <a:fld id="{5BCAD085-E8A6-8845-BD4E-CB4CCA059FC4}" type="datetimeFigureOut">
               <a:rPr lang="en-US" smtClean="0"/>
-              <a:t>10/14/2026</a:t>
+              <a:t>10/16/2026</a:t>
             </a:fld>
             <a:endParaRPr lang="en-US"/>
           </a:p>
@@ -1591,7 +1591,7 @@
           <a:p>
             <a:fld id="{5BCAD085-E8A6-8845-BD4E-CB4CCA059FC4}" type="datetimeFigureOut">
               <a:rPr lang="en-US" smtClean="0"/>
-              <a:t>10/14/2026</a:t>
+              <a:t>10/16/2026</a:t>
             </a:fld>
             <a:endParaRPr lang="en-US"/>
           </a:p>
@@ -1836,7 +1836,7 @@
           <a:p>
             <a:fld id="{5BCAD085-E8A6-8845-BD4E-CB4CCA059FC4}" type="datetimeFigureOut">
               <a:rPr lang="en-US" smtClean="0"/>
-              <a:t>10/14/2026</a:t>
+              <a:t>10/16/2026</a:t>
             </a:fld>
             <a:endParaRPr lang="en-US"/>
           </a:p>
@@ -2121,7 +2121,7 @@
           <a:p>
             <a:fld id="{5BCAD085-E8A6-8845-BD4E-CB4CCA059FC4}" type="datetimeFigureOut">
               <a:rPr lang="en-US" smtClean="0"/>
-              <a:t>10/14/2026</a:t>
+              <a:t>10/16/2026</a:t>
             </a:fld>
             <a:endParaRPr lang="en-US"/>
           </a:p>
@@ -2540,7 +2540,7 @@
           <a:p>
             <a:fld id="{5BCAD085-E8A6-8845-BD4E-CB4CCA059FC4}" type="datetimeFigureOut">
               <a:rPr lang="en-US" smtClean="0"/>
-              <a:t>10/14/2026</a:t>
+              <a:t>10/16/2026</a:t>
             </a:fld>
             <a:endParaRPr lang="en-US"/>
           </a:p>
@@ -2657,7 +2657,7 @@
           <a:p>
             <a:fld id="{5BCAD085-E8A6-8845-BD4E-CB4CCA059FC4}" type="datetimeFigureOut">
               <a:rPr lang="en-US" smtClean="0"/>
-              <a:t>10/14/2026</a:t>
+              <a:t>10/16/2026</a:t>
             </a:fld>
             <a:endParaRPr lang="en-US"/>
           </a:p>
@@ -2752,7 +2752,7 @@
           <a:p>
             <a:fld id="{5BCAD085-E8A6-8845-BD4E-CB4CCA059FC4}" type="datetimeFigureOut">
               <a:rPr lang="en-US" smtClean="0"/>
-              <a:t>10/14/2026</a:t>
+              <a:t>10/16/2026</a:t>
             </a:fld>
             <a:endParaRPr lang="en-US"/>
           </a:p>
@@ -3027,7 +3027,7 @@
           <a:p>
             <a:fld id="{5BCAD085-E8A6-8845-BD4E-CB4CCA059FC4}" type="datetimeFigureOut">
               <a:rPr lang="en-US" smtClean="0"/>
-              <a:t>10/14/2026</a:t>
+              <a:t>10/16/2026</a:t>
             </a:fld>
             <a:endParaRPr lang="en-US"/>
           </a:p>
@@ -3279,7 +3279,7 @@
           <a:p>
             <a:fld id="{5BCAD085-E8A6-8845-BD4E-CB4CCA059FC4}" type="datetimeFigureOut">
               <a:rPr lang="en-US" smtClean="0"/>
-              <a:t>10/14/2026</a:t>
+              <a:t>10/16/2026</a:t>
             </a:fld>
             <a:endParaRPr lang="en-US"/>
           </a:p>
@@ -3490,7 +3490,7 @@
           <a:p>
             <a:fld id="{5BCAD085-E8A6-8845-BD4E-CB4CCA059FC4}" type="datetimeFigureOut">
               <a:rPr lang="en-US" smtClean="0"/>
-              <a:t>10/14/2026</a:t>
+              <a:t>10/16/2026</a:t>
             </a:fld>
             <a:endParaRPr lang="en-US"/>
           </a:p>
@@ -4294,7 +4294,7 @@
     </p:spTree>
     <p:extLst>
       <p:ext uri="{BB962C8B-B14F-4D97-AF65-F5344CB8AC3E}">
-        <p14:creationId xmlns:p14="http://schemas.microsoft.com/office/powerpoint/2010/main" val="2524477207"/>
+        <p14:creationId xmlns:p14="http://schemas.microsoft.com/office/powerpoint/2010/main" val="128001777"/>
       </p:ext>
     </p:extLst>
   </p:cSld>
@@ -4802,7 +4802,7 @@
                 </a:solidFill>
                 <a:latin typeface="BIZ UDPGothic"/>
               </a:rPr>
-              <a:t>到着までの速さ</a:t>
+              <a:t>近道 H–A–G</a:t>
             </a:r>
           </a:p>
         </p:txBody>
@@ -4837,7 +4837,7 @@
                 </a:solidFill>
                 <a:latin typeface="BIZ UDPGothic"/>
               </a:rPr>
-              <a:t>雨にさらされる時間</a:t>
+              <a:t>屋根道 H–B–G</a:t>
             </a:r>
           </a:p>
         </p:txBody>
@@ -4977,7 +4977,7 @@
                 </a:solidFill>
                 <a:latin typeface="BIZ UDPGothic"/>
               </a:rPr>
-              <a:t>近道の移動時間</a:t>
+              <a:t>雨にさらされる時間</a:t>
             </a:r>
           </a:p>
         </p:txBody>
@@ -5012,8 +5012,8 @@
                 </a:solidFill>
                 <a:latin typeface="BIZ UDPGothic"/>
               </a:rPr>
-              <a:t>最短時間だけで
-経路を選ぶ考え方。</a:t>
+              <a:t>移動14分＝露出14分。
+全区間で雨にさらされる。</a:t>
             </a:r>
           </a:p>
         </p:txBody>
@@ -5083,7 +5083,7 @@
                 </a:solidFill>
                 <a:latin typeface="BIZ UDPGothic"/>
               </a:rPr>
-              <a:t>屋根道の露出時間</a:t>
+              <a:t>雨にさらされる時間</a:t>
             </a:r>
           </a:p>
         </p:txBody>
@@ -5118,8 +5118,8 @@
                 </a:solidFill>
                 <a:latin typeface="BIZ UDPGothic"/>
               </a:rPr>
-              <a:t>濡れにくさも含めて
-経路を選ぶ考え方。</a:t>
+              <a:t>移動18分のうち露出3分。
+移動は長いが露出は短い。</a:t>
             </a:r>
           </a:p>
         </p:txBody>
@@ -5127,7 +5127,7 @@
     </p:spTree>
     <p:extLst>
       <p:ext uri="{BB962C8B-B14F-4D97-AF65-F5344CB8AC3E}">
-        <p14:creationId xmlns:p14="http://schemas.microsoft.com/office/powerpoint/2010/main" val="1249033750"/>
+        <p14:creationId xmlns:p14="http://schemas.microsoft.com/office/powerpoint/2010/main" val="3945492982"/>
       </p:ext>
     </p:extLst>
   </p:cSld>
@@ -5788,13 +5788,18 @@
         </p:nvSpPr>
         <p:spPr>
           <a:xfrm>
-            <a:off x="2075687" y="2971800"/>
-            <a:ext cx="640080" cy="265176"/>
-          </a:xfrm>
-          <a:prstGeom prst="rect">
-            <a:avLst/>
-          </a:prstGeom>
-          <a:noFill/>
+            <a:off x="1920239" y="3049524"/>
+            <a:ext cx="822960" cy="301752"/>
+          </a:xfrm>
+          <a:prstGeom prst="rect">
+            <a:avLst/>
+          </a:prstGeom>
+          <a:solidFill>
+            <a:srgbClr val="FFFFFF"/>
+          </a:solidFill>
+          <a:ln>
+            <a:noFill/>
+          </a:ln>
         </p:spPr>
         <p:txBody>
           <a:bodyPr wrap="none" lIns="27432" rIns="27432" tIns="18288" bIns="18288" anchor="ctr">
@@ -5802,7 +5807,7 @@
           </a:bodyPr>
           <a:lstStyle/>
           <a:p>
-            <a:pPr algn="l"/>
+            <a:pPr algn="ctr"/>
             <a:r>
               <a:rPr sz="1400" b="1">
                 <a:solidFill>
@@ -5810,7 +5815,7 @@
                 </a:solidFill>
                 <a:latin typeface="BIZ UDPGothic"/>
               </a:rPr>
-              <a:t>6分</a:t>
+              <a:t>6 / 6</a:t>
             </a:r>
           </a:p>
         </p:txBody>
@@ -5858,13 +5863,18 @@
         </p:nvSpPr>
         <p:spPr>
           <a:xfrm>
-            <a:off x="3995928" y="2971800"/>
-            <a:ext cx="640080" cy="265176"/>
-          </a:xfrm>
-          <a:prstGeom prst="rect">
-            <a:avLst/>
-          </a:prstGeom>
-          <a:noFill/>
+            <a:off x="3840480" y="3049524"/>
+            <a:ext cx="822960" cy="301752"/>
+          </a:xfrm>
+          <a:prstGeom prst="rect">
+            <a:avLst/>
+          </a:prstGeom>
+          <a:solidFill>
+            <a:srgbClr val="FFFFFF"/>
+          </a:solidFill>
+          <a:ln>
+            <a:noFill/>
+          </a:ln>
         </p:spPr>
         <p:txBody>
           <a:bodyPr wrap="none" lIns="27432" rIns="27432" tIns="18288" bIns="18288" anchor="ctr">
@@ -5872,7 +5882,7 @@
           </a:bodyPr>
           <a:lstStyle/>
           <a:p>
-            <a:pPr algn="l"/>
+            <a:pPr algn="ctr"/>
             <a:r>
               <a:rPr sz="1400" b="1">
                 <a:solidFill>
@@ -5880,7 +5890,7 @@
                 </a:solidFill>
                 <a:latin typeface="BIZ UDPGothic"/>
               </a:rPr>
-              <a:t>8分</a:t>
+              <a:t>8 / 8</a:t>
             </a:r>
           </a:p>
         </p:txBody>
@@ -5928,13 +5938,18 @@
         </p:nvSpPr>
         <p:spPr>
           <a:xfrm>
-            <a:off x="2075687" y="3822191"/>
-            <a:ext cx="640080" cy="265176"/>
-          </a:xfrm>
-          <a:prstGeom prst="rect">
-            <a:avLst/>
-          </a:prstGeom>
-          <a:noFill/>
+            <a:off x="1920239" y="3598163"/>
+            <a:ext cx="822960" cy="301752"/>
+          </a:xfrm>
+          <a:prstGeom prst="rect">
+            <a:avLst/>
+          </a:prstGeom>
+          <a:solidFill>
+            <a:srgbClr val="FFFFFF"/>
+          </a:solidFill>
+          <a:ln>
+            <a:noFill/>
+          </a:ln>
         </p:spPr>
         <p:txBody>
           <a:bodyPr wrap="none" lIns="27432" rIns="27432" tIns="18288" bIns="18288" anchor="ctr">
@@ -5942,7 +5957,7 @@
           </a:bodyPr>
           <a:lstStyle/>
           <a:p>
-            <a:pPr algn="l"/>
+            <a:pPr algn="ctr"/>
             <a:r>
               <a:rPr sz="1400" b="1">
                 <a:solidFill>
@@ -5950,7 +5965,7 @@
                 </a:solidFill>
                 <a:latin typeface="BIZ UDPGothic"/>
               </a:rPr>
-              <a:t>8分</a:t>
+              <a:t>8 / 2</a:t>
             </a:r>
           </a:p>
         </p:txBody>
@@ -5998,13 +6013,18 @@
         </p:nvSpPr>
         <p:spPr>
           <a:xfrm>
-            <a:off x="3995928" y="3822191"/>
-            <a:ext cx="640080" cy="265176"/>
-          </a:xfrm>
-          <a:prstGeom prst="rect">
-            <a:avLst/>
-          </a:prstGeom>
-          <a:noFill/>
+            <a:off x="3840480" y="3598163"/>
+            <a:ext cx="822960" cy="301752"/>
+          </a:xfrm>
+          <a:prstGeom prst="rect">
+            <a:avLst/>
+          </a:prstGeom>
+          <a:solidFill>
+            <a:srgbClr val="FFFFFF"/>
+          </a:solidFill>
+          <a:ln>
+            <a:noFill/>
+          </a:ln>
         </p:spPr>
         <p:txBody>
           <a:bodyPr wrap="none" lIns="27432" rIns="27432" tIns="18288" bIns="18288" anchor="ctr">
@@ -6012,7 +6032,7 @@
           </a:bodyPr>
           <a:lstStyle/>
           <a:p>
-            <a:pPr algn="l"/>
+            <a:pPr algn="ctr"/>
             <a:r>
               <a:rPr sz="1400" b="1">
                 <a:solidFill>
@@ -6020,7 +6040,7 @@
                 </a:solidFill>
                 <a:latin typeface="BIZ UDPGothic"/>
               </a:rPr>
-              <a:t>10分</a:t>
+              <a:t>10 / 1</a:t>
             </a:r>
           </a:p>
         </p:txBody>
@@ -6068,13 +6088,18 @@
         </p:nvSpPr>
         <p:spPr>
           <a:xfrm>
-            <a:off x="2075687" y="4393692"/>
-            <a:ext cx="640080" cy="265176"/>
-          </a:xfrm>
-          <a:prstGeom prst="rect">
-            <a:avLst/>
-          </a:prstGeom>
-          <a:noFill/>
+            <a:off x="1920239" y="4169663"/>
+            <a:ext cx="822960" cy="301752"/>
+          </a:xfrm>
+          <a:prstGeom prst="rect">
+            <a:avLst/>
+          </a:prstGeom>
+          <a:solidFill>
+            <a:srgbClr val="FFFFFF"/>
+          </a:solidFill>
+          <a:ln>
+            <a:noFill/>
+          </a:ln>
         </p:spPr>
         <p:txBody>
           <a:bodyPr wrap="none" lIns="27432" rIns="27432" tIns="18288" bIns="18288" anchor="ctr">
@@ -6082,7 +6107,7 @@
           </a:bodyPr>
           <a:lstStyle/>
           <a:p>
-            <a:pPr algn="l"/>
+            <a:pPr algn="ctr"/>
             <a:r>
               <a:rPr sz="1400" b="1">
                 <a:solidFill>
@@ -6090,7 +6115,7 @@
                 </a:solidFill>
                 <a:latin typeface="BIZ UDPGothic"/>
               </a:rPr>
-              <a:t>7分</a:t>
+              <a:t>7 / 7</a:t>
             </a:r>
           </a:p>
         </p:txBody>
@@ -6138,13 +6163,18 @@
         </p:nvSpPr>
         <p:spPr>
           <a:xfrm>
-            <a:off x="3995928" y="4393692"/>
-            <a:ext cx="640080" cy="265176"/>
-          </a:xfrm>
-          <a:prstGeom prst="rect">
-            <a:avLst/>
-          </a:prstGeom>
-          <a:noFill/>
+            <a:off x="3840480" y="4169663"/>
+            <a:ext cx="822960" cy="301752"/>
+          </a:xfrm>
+          <a:prstGeom prst="rect">
+            <a:avLst/>
+          </a:prstGeom>
+          <a:solidFill>
+            <a:srgbClr val="FFFFFF"/>
+          </a:solidFill>
+          <a:ln>
+            <a:noFill/>
+          </a:ln>
         </p:spPr>
         <p:txBody>
           <a:bodyPr wrap="none" lIns="27432" rIns="27432" tIns="18288" bIns="18288" anchor="ctr">
@@ -6152,7 +6182,7 @@
           </a:bodyPr>
           <a:lstStyle/>
           <a:p>
-            <a:pPr algn="l"/>
+            <a:pPr algn="ctr"/>
             <a:r>
               <a:rPr sz="1400" b="1">
                 <a:solidFill>
@@ -6160,7 +6190,7 @@
                 </a:solidFill>
                 <a:latin typeface="BIZ UDPGothic"/>
               </a:rPr>
-              <a:t>9分</a:t>
+              <a:t>9 / 9</a:t>
             </a:r>
           </a:p>
         </p:txBody>
@@ -6573,7 +6603,7 @@
         </p:nvSpPr>
         <p:spPr>
           <a:xfrm>
-            <a:off x="987552" y="4206240"/>
+            <a:off x="987552" y="4023360"/>
             <a:ext cx="1371600" cy="329184"/>
           </a:xfrm>
           <a:prstGeom prst="rect">
@@ -6608,7 +6638,7 @@
         </p:nvSpPr>
         <p:spPr>
           <a:xfrm>
-            <a:off x="4855464" y="4206240"/>
+            <a:off x="4855464" y="4023360"/>
             <a:ext cx="1371600" cy="329184"/>
           </a:xfrm>
           <a:prstGeom prst="rect">
@@ -6678,7 +6708,7 @@
         </p:nvSpPr>
         <p:spPr>
           <a:xfrm>
-            <a:off x="2587752" y="4069080"/>
+            <a:off x="2743200" y="3236976"/>
             <a:ext cx="1371600" cy="329184"/>
           </a:xfrm>
           <a:prstGeom prst="rect">
@@ -6700,7 +6730,7 @@
                 </a:solidFill>
                 <a:latin typeface="BIZ UDPGothic"/>
               </a:rPr>
-              <a:t>屋根のある道</a:t>
+              <a:t>アーケード</a:t>
             </a:r>
           </a:p>
         </p:txBody>
@@ -6842,8 +6872,8 @@
                 </a:solidFill>
                 <a:latin typeface="BIZ UDPGothic"/>
               </a:rPr>
-              <a:t>移動時間 t と露出時間 e を
-別々に足し合わせる。</a:t>
+              <a:t>各辺は 移動 t / 露出 e（分）。
+t と e は別々に足し合わせる。</a:t>
             </a:r>
           </a:p>
         </p:txBody>
@@ -6851,7 +6881,7 @@
     </p:spTree>
     <p:extLst>
       <p:ext uri="{BB962C8B-B14F-4D97-AF65-F5344CB8AC3E}">
-        <p14:creationId xmlns:p14="http://schemas.microsoft.com/office/powerpoint/2010/main" val="3582070808"/>
+        <p14:creationId xmlns:p14="http://schemas.microsoft.com/office/powerpoint/2010/main" val="2817996173"/>
       </p:ext>
     </p:extLst>
   </p:cSld>
@@ -8151,7 +8181,7 @@
     </p:spTree>
     <p:extLst>
       <p:ext uri="{BB962C8B-B14F-4D97-AF65-F5344CB8AC3E}">
-        <p14:creationId xmlns:p14="http://schemas.microsoft.com/office/powerpoint/2010/main" val="2775875775"/>
+        <p14:creationId xmlns:p14="http://schemas.microsoft.com/office/powerpoint/2010/main" val="437853709"/>
       </p:ext>
     </p:extLst>
   </p:cSld>
@@ -9124,7 +9154,7 @@
     </p:spTree>
     <p:extLst>
       <p:ext uri="{BB962C8B-B14F-4D97-AF65-F5344CB8AC3E}">
-        <p14:creationId xmlns:p14="http://schemas.microsoft.com/office/powerpoint/2010/main" val="2283905930"/>
+        <p14:creationId xmlns:p14="http://schemas.microsoft.com/office/powerpoint/2010/main" val="2101470553"/>
       </p:ext>
     </p:extLst>
   </p:cSld>
@@ -9751,7 +9781,7 @@
         <p:spPr>
           <a:xfrm>
             <a:off x="960120" y="2468880"/>
-            <a:ext cx="4663440" cy="2011680"/>
+            <a:ext cx="4663440" cy="1417320"/>
           </a:xfrm>
           <a:prstGeom prst="rect">
             <a:avLst/>
@@ -9787,7 +9817,7 @@
         </p:nvSpPr>
         <p:spPr>
           <a:xfrm>
-            <a:off x="960120" y="4617720"/>
+            <a:off x="960120" y="4343400"/>
             <a:ext cx="4663440" cy="777240"/>
           </a:xfrm>
           <a:prstGeom prst="rect">
@@ -10168,8 +10198,8 @@
         </p:nvSpPr>
         <p:spPr>
           <a:xfrm>
-            <a:off x="6537960" y="5385816"/>
-            <a:ext cx="4663440" cy="237744"/>
+            <a:off x="6537960" y="5074920"/>
+            <a:ext cx="4663440" cy="411480"/>
           </a:xfrm>
           <a:prstGeom prst="rect">
             <a:avLst/>
@@ -10184,13 +10214,13 @@
           <a:p>
             <a:pPr algn="l"/>
             <a:r>
-              <a:rPr sz="1100" b="0">
+              <a:rPr sz="1400" b="0">
                 <a:solidFill>
                   <a:srgbClr val="1B253D"/>
                 </a:solidFill>
                 <a:latin typeface="BIZ UDPGothic"/>
               </a:rPr>
-              <a:t>実測は今後の計画。まだ実施していません。</a:t>
+              <a:t>実測は未実施。次に測り方を決める。</a:t>
             </a:r>
           </a:p>
         </p:txBody>
@@ -10198,7 +10228,7 @@
     </p:spTree>
     <p:extLst>
       <p:ext uri="{BB962C8B-B14F-4D97-AF65-F5344CB8AC3E}">
-        <p14:creationId xmlns:p14="http://schemas.microsoft.com/office/powerpoint/2010/main" val="514539770"/>
+        <p14:creationId xmlns:p14="http://schemas.microsoft.com/office/powerpoint/2010/main" val="1152057348"/>
       </p:ext>
     </p:extLst>
   </p:cSld>
